--- a/public/videos/repositories/smoking-stay-alert/smoking-stay-alert-tech-preview.pptx
+++ b/public/videos/repositories/smoking-stay-alert/smoking-stay-alert-tech-preview.pptx
@@ -134,7 +134,7 @@
           <p:cNvPr id="2" name="タイトル 1">
             <a:extLst>
               <a:ext uri="{FF2B5EF4-FFF2-40B4-BE49-F238E27FC236}">
-                <a16:creationId xmlns:a16="http://schemas.microsoft.com/office/drawing/2014/main" id="{2CFBCD37-9498-B5DB-BB33-0C7ACCAE95E7}"/>
+                <a16:creationId xmlns:a16="http://schemas.microsoft.com/office/drawing/2014/main" id="{169D2594-8A05-DE30-F7F9-DE11E640289B}"/>
               </a:ext>
             </a:extLst>
           </p:cNvPr>
@@ -171,7 +171,7 @@
           <p:cNvPr id="3" name="字幕 2">
             <a:extLst>
               <a:ext uri="{FF2B5EF4-FFF2-40B4-BE49-F238E27FC236}">
-                <a16:creationId xmlns:a16="http://schemas.microsoft.com/office/drawing/2014/main" id="{948DAE0B-D416-7487-36CE-DB9E91CC317A}"/>
+                <a16:creationId xmlns:a16="http://schemas.microsoft.com/office/drawing/2014/main" id="{554088FA-A8E7-FF14-AE45-4E37EC2181A4}"/>
               </a:ext>
             </a:extLst>
           </p:cNvPr>
@@ -241,7 +241,7 @@
           <p:cNvPr id="4" name="日付プレースホルダー 3">
             <a:extLst>
               <a:ext uri="{FF2B5EF4-FFF2-40B4-BE49-F238E27FC236}">
-                <a16:creationId xmlns:a16="http://schemas.microsoft.com/office/drawing/2014/main" id="{01F7883C-220E-1489-8EE8-756D0EA354DF}"/>
+                <a16:creationId xmlns:a16="http://schemas.microsoft.com/office/drawing/2014/main" id="{0C4D9F58-9A91-CC5D-BC3E-517BB1BD81D5}"/>
               </a:ext>
             </a:extLst>
           </p:cNvPr>
@@ -257,7 +257,7 @@
           <a:bodyPr/>
           <a:lstStyle/>
           <a:p>
-            <a:fld id="{254FE170-FB10-4E9A-9B4E-124961B13B8D}" type="datetimeFigureOut">
+            <a:fld id="{C004223E-9982-4FFA-B17B-D0FEA01B5643}" type="datetimeFigureOut">
               <a:rPr kumimoji="1" lang="ja-JP" altLang="en-US" smtClean="0"/>
               <a:t>2026/7/30</a:t>
             </a:fld>
@@ -270,7 +270,7 @@
           <p:cNvPr id="5" name="フッター プレースホルダー 4">
             <a:extLst>
               <a:ext uri="{FF2B5EF4-FFF2-40B4-BE49-F238E27FC236}">
-                <a16:creationId xmlns:a16="http://schemas.microsoft.com/office/drawing/2014/main" id="{B3A5A951-A5EF-AFA3-42D5-7090CCC1547B}"/>
+                <a16:creationId xmlns:a16="http://schemas.microsoft.com/office/drawing/2014/main" id="{2E9E9DC0-5123-D3EB-18BC-3E93E4521871}"/>
               </a:ext>
             </a:extLst>
           </p:cNvPr>
@@ -295,7 +295,7 @@
           <p:cNvPr id="6" name="スライド番号プレースホルダー 5">
             <a:extLst>
               <a:ext uri="{FF2B5EF4-FFF2-40B4-BE49-F238E27FC236}">
-                <a16:creationId xmlns:a16="http://schemas.microsoft.com/office/drawing/2014/main" id="{7E28D807-9CEE-DADF-0ED9-A10EA8201ABE}"/>
+                <a16:creationId xmlns:a16="http://schemas.microsoft.com/office/drawing/2014/main" id="{CF812B5A-38D6-F35B-C106-525301D1BE81}"/>
               </a:ext>
             </a:extLst>
           </p:cNvPr>
@@ -311,7 +311,7 @@
           <a:bodyPr/>
           <a:lstStyle/>
           <a:p>
-            <a:fld id="{5E2C72A1-BC9D-437B-BECB-2EBDB5F913C5}" type="slidenum">
+            <a:fld id="{454A2CEA-8771-4DFB-BBAA-8A4F904143C0}" type="slidenum">
               <a:rPr kumimoji="1" lang="ja-JP" altLang="en-US" smtClean="0"/>
               <a:t>‹#›</a:t>
             </a:fld>
@@ -322,7 +322,7 @@
     </p:spTree>
     <p:extLst>
       <p:ext uri="{BB962C8B-B14F-4D97-AF65-F5344CB8AC3E}">
-        <p14:creationId xmlns:p14="http://schemas.microsoft.com/office/powerpoint/2010/main" val="2994200318"/>
+        <p14:creationId xmlns:p14="http://schemas.microsoft.com/office/powerpoint/2010/main" val="1340759481"/>
       </p:ext>
     </p:extLst>
   </p:cSld>
@@ -354,7 +354,7 @@
           <p:cNvPr id="2" name="タイトル 1">
             <a:extLst>
               <a:ext uri="{FF2B5EF4-FFF2-40B4-BE49-F238E27FC236}">
-                <a16:creationId xmlns:a16="http://schemas.microsoft.com/office/drawing/2014/main" id="{816B725F-8945-3D95-E3AE-831A9411B97E}"/>
+                <a16:creationId xmlns:a16="http://schemas.microsoft.com/office/drawing/2014/main" id="{1C633AD8-13E6-972D-B4A9-3CDB03916700}"/>
               </a:ext>
             </a:extLst>
           </p:cNvPr>
@@ -382,7 +382,7 @@
           <p:cNvPr id="3" name="縦書きテキスト プレースホルダー 2">
             <a:extLst>
               <a:ext uri="{FF2B5EF4-FFF2-40B4-BE49-F238E27FC236}">
-                <a16:creationId xmlns:a16="http://schemas.microsoft.com/office/drawing/2014/main" id="{54C5C3D1-A8DC-30C6-2E2E-4636482EB97F}"/>
+                <a16:creationId xmlns:a16="http://schemas.microsoft.com/office/drawing/2014/main" id="{F44CC6F0-68DB-E636-D349-78874B1117D1}"/>
               </a:ext>
             </a:extLst>
           </p:cNvPr>
@@ -471,7 +471,7 @@
           <p:cNvPr id="4" name="日付プレースホルダー 3">
             <a:extLst>
               <a:ext uri="{FF2B5EF4-FFF2-40B4-BE49-F238E27FC236}">
-                <a16:creationId xmlns:a16="http://schemas.microsoft.com/office/drawing/2014/main" id="{57DC6E83-8F3C-EEEA-0151-78411610669C}"/>
+                <a16:creationId xmlns:a16="http://schemas.microsoft.com/office/drawing/2014/main" id="{558568F9-CB8C-B169-7DBE-8F20A48294DF}"/>
               </a:ext>
             </a:extLst>
           </p:cNvPr>
@@ -487,7 +487,7 @@
           <a:bodyPr/>
           <a:lstStyle/>
           <a:p>
-            <a:fld id="{254FE170-FB10-4E9A-9B4E-124961B13B8D}" type="datetimeFigureOut">
+            <a:fld id="{C004223E-9982-4FFA-B17B-D0FEA01B5643}" type="datetimeFigureOut">
               <a:rPr kumimoji="1" lang="ja-JP" altLang="en-US" smtClean="0"/>
               <a:t>2026/7/30</a:t>
             </a:fld>
@@ -500,7 +500,7 @@
           <p:cNvPr id="5" name="フッター プレースホルダー 4">
             <a:extLst>
               <a:ext uri="{FF2B5EF4-FFF2-40B4-BE49-F238E27FC236}">
-                <a16:creationId xmlns:a16="http://schemas.microsoft.com/office/drawing/2014/main" id="{4BB52663-AB6F-7484-069D-DA4E6BB08B85}"/>
+                <a16:creationId xmlns:a16="http://schemas.microsoft.com/office/drawing/2014/main" id="{D0B08A87-0A8F-D9A9-9316-9CC5D90D18AA}"/>
               </a:ext>
             </a:extLst>
           </p:cNvPr>
@@ -525,7 +525,7 @@
           <p:cNvPr id="6" name="スライド番号プレースホルダー 5">
             <a:extLst>
               <a:ext uri="{FF2B5EF4-FFF2-40B4-BE49-F238E27FC236}">
-                <a16:creationId xmlns:a16="http://schemas.microsoft.com/office/drawing/2014/main" id="{9C9001CA-ADB7-D6E8-9DD2-3E80081C2CA2}"/>
+                <a16:creationId xmlns:a16="http://schemas.microsoft.com/office/drawing/2014/main" id="{AD3971C9-49F3-048F-28EA-5079A9C4437E}"/>
               </a:ext>
             </a:extLst>
           </p:cNvPr>
@@ -541,7 +541,7 @@
           <a:bodyPr/>
           <a:lstStyle/>
           <a:p>
-            <a:fld id="{5E2C72A1-BC9D-437B-BECB-2EBDB5F913C5}" type="slidenum">
+            <a:fld id="{454A2CEA-8771-4DFB-BBAA-8A4F904143C0}" type="slidenum">
               <a:rPr kumimoji="1" lang="ja-JP" altLang="en-US" smtClean="0"/>
               <a:t>‹#›</a:t>
             </a:fld>
@@ -552,7 +552,7 @@
     </p:spTree>
     <p:extLst>
       <p:ext uri="{BB962C8B-B14F-4D97-AF65-F5344CB8AC3E}">
-        <p14:creationId xmlns:p14="http://schemas.microsoft.com/office/powerpoint/2010/main" val="3939025443"/>
+        <p14:creationId xmlns:p14="http://schemas.microsoft.com/office/powerpoint/2010/main" val="549967267"/>
       </p:ext>
     </p:extLst>
   </p:cSld>
@@ -584,7 +584,7 @@
           <p:cNvPr id="2" name="縦書きタイトル 1">
             <a:extLst>
               <a:ext uri="{FF2B5EF4-FFF2-40B4-BE49-F238E27FC236}">
-                <a16:creationId xmlns:a16="http://schemas.microsoft.com/office/drawing/2014/main" id="{C79A6C73-E6C0-D2E5-19AB-4683430A7875}"/>
+                <a16:creationId xmlns:a16="http://schemas.microsoft.com/office/drawing/2014/main" id="{1B5A362F-3005-A87A-8B49-9234484364BD}"/>
               </a:ext>
             </a:extLst>
           </p:cNvPr>
@@ -617,7 +617,7 @@
           <p:cNvPr id="3" name="縦書きテキスト プレースホルダー 2">
             <a:extLst>
               <a:ext uri="{FF2B5EF4-FFF2-40B4-BE49-F238E27FC236}">
-                <a16:creationId xmlns:a16="http://schemas.microsoft.com/office/drawing/2014/main" id="{CBD6F7EB-C1A2-761E-9031-14EDB302FECA}"/>
+                <a16:creationId xmlns:a16="http://schemas.microsoft.com/office/drawing/2014/main" id="{EFEF8390-5343-EECF-4527-2EC6CAEB7925}"/>
               </a:ext>
             </a:extLst>
           </p:cNvPr>
@@ -711,7 +711,7 @@
           <p:cNvPr id="4" name="日付プレースホルダー 3">
             <a:extLst>
               <a:ext uri="{FF2B5EF4-FFF2-40B4-BE49-F238E27FC236}">
-                <a16:creationId xmlns:a16="http://schemas.microsoft.com/office/drawing/2014/main" id="{BD91B7B9-57C0-08B8-83BA-0315FF35E7E7}"/>
+                <a16:creationId xmlns:a16="http://schemas.microsoft.com/office/drawing/2014/main" id="{48C7C77E-7774-0AF7-357D-519A8EF89E16}"/>
               </a:ext>
             </a:extLst>
           </p:cNvPr>
@@ -727,7 +727,7 @@
           <a:bodyPr/>
           <a:lstStyle/>
           <a:p>
-            <a:fld id="{254FE170-FB10-4E9A-9B4E-124961B13B8D}" type="datetimeFigureOut">
+            <a:fld id="{C004223E-9982-4FFA-B17B-D0FEA01B5643}" type="datetimeFigureOut">
               <a:rPr kumimoji="1" lang="ja-JP" altLang="en-US" smtClean="0"/>
               <a:t>2026/7/30</a:t>
             </a:fld>
@@ -740,7 +740,7 @@
           <p:cNvPr id="5" name="フッター プレースホルダー 4">
             <a:extLst>
               <a:ext uri="{FF2B5EF4-FFF2-40B4-BE49-F238E27FC236}">
-                <a16:creationId xmlns:a16="http://schemas.microsoft.com/office/drawing/2014/main" id="{A910C12E-9AEF-CB54-204C-1E97050B9424}"/>
+                <a16:creationId xmlns:a16="http://schemas.microsoft.com/office/drawing/2014/main" id="{2E57872A-DCC1-3D3E-B95D-CCF61EC3C878}"/>
               </a:ext>
             </a:extLst>
           </p:cNvPr>
@@ -765,7 +765,7 @@
           <p:cNvPr id="6" name="スライド番号プレースホルダー 5">
             <a:extLst>
               <a:ext uri="{FF2B5EF4-FFF2-40B4-BE49-F238E27FC236}">
-                <a16:creationId xmlns:a16="http://schemas.microsoft.com/office/drawing/2014/main" id="{8891F229-683F-EF70-3A4D-EB87B1CFF78F}"/>
+                <a16:creationId xmlns:a16="http://schemas.microsoft.com/office/drawing/2014/main" id="{81CE40D8-4BBE-65EE-BCD6-D692E377CF58}"/>
               </a:ext>
             </a:extLst>
           </p:cNvPr>
@@ -781,7 +781,7 @@
           <a:bodyPr/>
           <a:lstStyle/>
           <a:p>
-            <a:fld id="{5E2C72A1-BC9D-437B-BECB-2EBDB5F913C5}" type="slidenum">
+            <a:fld id="{454A2CEA-8771-4DFB-BBAA-8A4F904143C0}" type="slidenum">
               <a:rPr kumimoji="1" lang="ja-JP" altLang="en-US" smtClean="0"/>
               <a:t>‹#›</a:t>
             </a:fld>
@@ -792,7 +792,7 @@
     </p:spTree>
     <p:extLst>
       <p:ext uri="{BB962C8B-B14F-4D97-AF65-F5344CB8AC3E}">
-        <p14:creationId xmlns:p14="http://schemas.microsoft.com/office/powerpoint/2010/main" val="3198270864"/>
+        <p14:creationId xmlns:p14="http://schemas.microsoft.com/office/powerpoint/2010/main" val="107363265"/>
       </p:ext>
     </p:extLst>
   </p:cSld>
@@ -824,7 +824,7 @@
           <p:cNvPr id="2" name="タイトル 1">
             <a:extLst>
               <a:ext uri="{FF2B5EF4-FFF2-40B4-BE49-F238E27FC236}">
-                <a16:creationId xmlns:a16="http://schemas.microsoft.com/office/drawing/2014/main" id="{965B5FDA-ED7B-EF8D-5091-E96B70887517}"/>
+                <a16:creationId xmlns:a16="http://schemas.microsoft.com/office/drawing/2014/main" id="{CAB89EC1-175C-D2DE-036C-78CBDE79F0F2}"/>
               </a:ext>
             </a:extLst>
           </p:cNvPr>
@@ -852,7 +852,7 @@
           <p:cNvPr id="3" name="コンテンツ プレースホルダー 2">
             <a:extLst>
               <a:ext uri="{FF2B5EF4-FFF2-40B4-BE49-F238E27FC236}">
-                <a16:creationId xmlns:a16="http://schemas.microsoft.com/office/drawing/2014/main" id="{D0240267-9CF8-0B3B-20D9-B8DF94F3C450}"/>
+                <a16:creationId xmlns:a16="http://schemas.microsoft.com/office/drawing/2014/main" id="{71FAB8E1-E8D2-A525-75E4-BFC3EEA8E530}"/>
               </a:ext>
             </a:extLst>
           </p:cNvPr>
@@ -941,7 +941,7 @@
           <p:cNvPr id="4" name="日付プレースホルダー 3">
             <a:extLst>
               <a:ext uri="{FF2B5EF4-FFF2-40B4-BE49-F238E27FC236}">
-                <a16:creationId xmlns:a16="http://schemas.microsoft.com/office/drawing/2014/main" id="{FE400D01-93C4-A55B-C97B-183182109D88}"/>
+                <a16:creationId xmlns:a16="http://schemas.microsoft.com/office/drawing/2014/main" id="{3285FEA1-565A-0A7A-35C9-E77AECE0E27C}"/>
               </a:ext>
             </a:extLst>
           </p:cNvPr>
@@ -957,7 +957,7 @@
           <a:bodyPr/>
           <a:lstStyle/>
           <a:p>
-            <a:fld id="{254FE170-FB10-4E9A-9B4E-124961B13B8D}" type="datetimeFigureOut">
+            <a:fld id="{C004223E-9982-4FFA-B17B-D0FEA01B5643}" type="datetimeFigureOut">
               <a:rPr kumimoji="1" lang="ja-JP" altLang="en-US" smtClean="0"/>
               <a:t>2026/7/30</a:t>
             </a:fld>
@@ -970,7 +970,7 @@
           <p:cNvPr id="5" name="フッター プレースホルダー 4">
             <a:extLst>
               <a:ext uri="{FF2B5EF4-FFF2-40B4-BE49-F238E27FC236}">
-                <a16:creationId xmlns:a16="http://schemas.microsoft.com/office/drawing/2014/main" id="{97B61062-59F4-36E5-5CC1-02416EA87437}"/>
+                <a16:creationId xmlns:a16="http://schemas.microsoft.com/office/drawing/2014/main" id="{98664C4E-3903-F97C-C33F-2CDB13900166}"/>
               </a:ext>
             </a:extLst>
           </p:cNvPr>
@@ -995,7 +995,7 @@
           <p:cNvPr id="6" name="スライド番号プレースホルダー 5">
             <a:extLst>
               <a:ext uri="{FF2B5EF4-FFF2-40B4-BE49-F238E27FC236}">
-                <a16:creationId xmlns:a16="http://schemas.microsoft.com/office/drawing/2014/main" id="{B88138AD-CCA9-06E4-DF53-745279421A3F}"/>
+                <a16:creationId xmlns:a16="http://schemas.microsoft.com/office/drawing/2014/main" id="{EF2299F0-7A75-FA38-05A8-BA9BCEC74608}"/>
               </a:ext>
             </a:extLst>
           </p:cNvPr>
@@ -1011,7 +1011,7 @@
           <a:bodyPr/>
           <a:lstStyle/>
           <a:p>
-            <a:fld id="{5E2C72A1-BC9D-437B-BECB-2EBDB5F913C5}" type="slidenum">
+            <a:fld id="{454A2CEA-8771-4DFB-BBAA-8A4F904143C0}" type="slidenum">
               <a:rPr kumimoji="1" lang="ja-JP" altLang="en-US" smtClean="0"/>
               <a:t>‹#›</a:t>
             </a:fld>
@@ -1022,7 +1022,7 @@
     </p:spTree>
     <p:extLst>
       <p:ext uri="{BB962C8B-B14F-4D97-AF65-F5344CB8AC3E}">
-        <p14:creationId xmlns:p14="http://schemas.microsoft.com/office/powerpoint/2010/main" val="3664190139"/>
+        <p14:creationId xmlns:p14="http://schemas.microsoft.com/office/powerpoint/2010/main" val="987266792"/>
       </p:ext>
     </p:extLst>
   </p:cSld>
@@ -1054,7 +1054,7 @@
           <p:cNvPr id="2" name="タイトル 1">
             <a:extLst>
               <a:ext uri="{FF2B5EF4-FFF2-40B4-BE49-F238E27FC236}">
-                <a16:creationId xmlns:a16="http://schemas.microsoft.com/office/drawing/2014/main" id="{D7513FF9-CAAD-1AE3-BFCC-691E5E33FA9C}"/>
+                <a16:creationId xmlns:a16="http://schemas.microsoft.com/office/drawing/2014/main" id="{A8EF6391-8006-3428-272A-D06CCF6BD8B3}"/>
               </a:ext>
             </a:extLst>
           </p:cNvPr>
@@ -1091,7 +1091,7 @@
           <p:cNvPr id="3" name="テキスト プレースホルダー 2">
             <a:extLst>
               <a:ext uri="{FF2B5EF4-FFF2-40B4-BE49-F238E27FC236}">
-                <a16:creationId xmlns:a16="http://schemas.microsoft.com/office/drawing/2014/main" id="{9F7BD494-8B9D-9CF8-D1E2-6F820D994208}"/>
+                <a16:creationId xmlns:a16="http://schemas.microsoft.com/office/drawing/2014/main" id="{4CDFC929-3563-912F-D59C-EF8D4DD7C57F}"/>
               </a:ext>
             </a:extLst>
           </p:cNvPr>
@@ -1216,7 +1216,7 @@
           <p:cNvPr id="4" name="日付プレースホルダー 3">
             <a:extLst>
               <a:ext uri="{FF2B5EF4-FFF2-40B4-BE49-F238E27FC236}">
-                <a16:creationId xmlns:a16="http://schemas.microsoft.com/office/drawing/2014/main" id="{14E00CBD-EEA6-73AA-0925-6E5FE770626B}"/>
+                <a16:creationId xmlns:a16="http://schemas.microsoft.com/office/drawing/2014/main" id="{D7BB4BDA-018F-B2A1-95C7-A67D89F666B1}"/>
               </a:ext>
             </a:extLst>
           </p:cNvPr>
@@ -1232,7 +1232,7 @@
           <a:bodyPr/>
           <a:lstStyle/>
           <a:p>
-            <a:fld id="{254FE170-FB10-4E9A-9B4E-124961B13B8D}" type="datetimeFigureOut">
+            <a:fld id="{C004223E-9982-4FFA-B17B-D0FEA01B5643}" type="datetimeFigureOut">
               <a:rPr kumimoji="1" lang="ja-JP" altLang="en-US" smtClean="0"/>
               <a:t>2026/7/30</a:t>
             </a:fld>
@@ -1245,7 +1245,7 @@
           <p:cNvPr id="5" name="フッター プレースホルダー 4">
             <a:extLst>
               <a:ext uri="{FF2B5EF4-FFF2-40B4-BE49-F238E27FC236}">
-                <a16:creationId xmlns:a16="http://schemas.microsoft.com/office/drawing/2014/main" id="{EEFCD95A-F163-DD79-9F7B-202D890C2939}"/>
+                <a16:creationId xmlns:a16="http://schemas.microsoft.com/office/drawing/2014/main" id="{40D5E3A0-361E-1EDB-BF9A-45E7F9980BA3}"/>
               </a:ext>
             </a:extLst>
           </p:cNvPr>
@@ -1270,7 +1270,7 @@
           <p:cNvPr id="6" name="スライド番号プレースホルダー 5">
             <a:extLst>
               <a:ext uri="{FF2B5EF4-FFF2-40B4-BE49-F238E27FC236}">
-                <a16:creationId xmlns:a16="http://schemas.microsoft.com/office/drawing/2014/main" id="{2D98F5F4-C763-A736-EEB4-3E4188F8EF70}"/>
+                <a16:creationId xmlns:a16="http://schemas.microsoft.com/office/drawing/2014/main" id="{BE3D1F8D-ABD1-6FB1-937D-15586830A1DA}"/>
               </a:ext>
             </a:extLst>
           </p:cNvPr>
@@ -1286,7 +1286,7 @@
           <a:bodyPr/>
           <a:lstStyle/>
           <a:p>
-            <a:fld id="{5E2C72A1-BC9D-437B-BECB-2EBDB5F913C5}" type="slidenum">
+            <a:fld id="{454A2CEA-8771-4DFB-BBAA-8A4F904143C0}" type="slidenum">
               <a:rPr kumimoji="1" lang="ja-JP" altLang="en-US" smtClean="0"/>
               <a:t>‹#›</a:t>
             </a:fld>
@@ -1297,7 +1297,7 @@
     </p:spTree>
     <p:extLst>
       <p:ext uri="{BB962C8B-B14F-4D97-AF65-F5344CB8AC3E}">
-        <p14:creationId xmlns:p14="http://schemas.microsoft.com/office/powerpoint/2010/main" val="3130582604"/>
+        <p14:creationId xmlns:p14="http://schemas.microsoft.com/office/powerpoint/2010/main" val="2524754477"/>
       </p:ext>
     </p:extLst>
   </p:cSld>
@@ -1329,7 +1329,7 @@
           <p:cNvPr id="2" name="タイトル 1">
             <a:extLst>
               <a:ext uri="{FF2B5EF4-FFF2-40B4-BE49-F238E27FC236}">
-                <a16:creationId xmlns:a16="http://schemas.microsoft.com/office/drawing/2014/main" id="{DB723023-2D8E-22C5-3CF5-5938574F69BF}"/>
+                <a16:creationId xmlns:a16="http://schemas.microsoft.com/office/drawing/2014/main" id="{24B3B65A-0ABB-92C5-4E4C-82D424EE66C4}"/>
               </a:ext>
             </a:extLst>
           </p:cNvPr>
@@ -1357,7 +1357,7 @@
           <p:cNvPr id="3" name="コンテンツ プレースホルダー 2">
             <a:extLst>
               <a:ext uri="{FF2B5EF4-FFF2-40B4-BE49-F238E27FC236}">
-                <a16:creationId xmlns:a16="http://schemas.microsoft.com/office/drawing/2014/main" id="{BB4EF15D-489C-1759-BAFD-4F0AF8AFBE15}"/>
+                <a16:creationId xmlns:a16="http://schemas.microsoft.com/office/drawing/2014/main" id="{6E604DB9-DD0C-4B9D-C51C-EF2C5A89A0FD}"/>
               </a:ext>
             </a:extLst>
           </p:cNvPr>
@@ -1451,7 +1451,7 @@
           <p:cNvPr id="4" name="コンテンツ プレースホルダー 3">
             <a:extLst>
               <a:ext uri="{FF2B5EF4-FFF2-40B4-BE49-F238E27FC236}">
-                <a16:creationId xmlns:a16="http://schemas.microsoft.com/office/drawing/2014/main" id="{6820D93F-36FF-6B40-DCEC-D133C2B734FF}"/>
+                <a16:creationId xmlns:a16="http://schemas.microsoft.com/office/drawing/2014/main" id="{761761FC-901D-12A6-B5CA-0F91C51894C5}"/>
               </a:ext>
             </a:extLst>
           </p:cNvPr>
@@ -1545,7 +1545,7 @@
           <p:cNvPr id="5" name="日付プレースホルダー 4">
             <a:extLst>
               <a:ext uri="{FF2B5EF4-FFF2-40B4-BE49-F238E27FC236}">
-                <a16:creationId xmlns:a16="http://schemas.microsoft.com/office/drawing/2014/main" id="{71D015BE-8AB1-015C-D3C3-B0AEFFE74BD8}"/>
+                <a16:creationId xmlns:a16="http://schemas.microsoft.com/office/drawing/2014/main" id="{2727F34F-DC5E-DE4A-2FD3-056C4CBF4FDC}"/>
               </a:ext>
             </a:extLst>
           </p:cNvPr>
@@ -1561,7 +1561,7 @@
           <a:bodyPr/>
           <a:lstStyle/>
           <a:p>
-            <a:fld id="{254FE170-FB10-4E9A-9B4E-124961B13B8D}" type="datetimeFigureOut">
+            <a:fld id="{C004223E-9982-4FFA-B17B-D0FEA01B5643}" type="datetimeFigureOut">
               <a:rPr kumimoji="1" lang="ja-JP" altLang="en-US" smtClean="0"/>
               <a:t>2026/7/30</a:t>
             </a:fld>
@@ -1574,7 +1574,7 @@
           <p:cNvPr id="6" name="フッター プレースホルダー 5">
             <a:extLst>
               <a:ext uri="{FF2B5EF4-FFF2-40B4-BE49-F238E27FC236}">
-                <a16:creationId xmlns:a16="http://schemas.microsoft.com/office/drawing/2014/main" id="{C06E27D2-A7B9-C6DF-9AAB-77B019487719}"/>
+                <a16:creationId xmlns:a16="http://schemas.microsoft.com/office/drawing/2014/main" id="{99B5DAEA-8AD0-DDDE-3EB8-EB37F2D07834}"/>
               </a:ext>
             </a:extLst>
           </p:cNvPr>
@@ -1599,7 +1599,7 @@
           <p:cNvPr id="7" name="スライド番号プレースホルダー 6">
             <a:extLst>
               <a:ext uri="{FF2B5EF4-FFF2-40B4-BE49-F238E27FC236}">
-                <a16:creationId xmlns:a16="http://schemas.microsoft.com/office/drawing/2014/main" id="{0F4F54C3-FB10-C000-9252-E2AF013F628E}"/>
+                <a16:creationId xmlns:a16="http://schemas.microsoft.com/office/drawing/2014/main" id="{DCDE5B4C-723F-FE76-1205-9E8FB5E32C14}"/>
               </a:ext>
             </a:extLst>
           </p:cNvPr>
@@ -1615,7 +1615,7 @@
           <a:bodyPr/>
           <a:lstStyle/>
           <a:p>
-            <a:fld id="{5E2C72A1-BC9D-437B-BECB-2EBDB5F913C5}" type="slidenum">
+            <a:fld id="{454A2CEA-8771-4DFB-BBAA-8A4F904143C0}" type="slidenum">
               <a:rPr kumimoji="1" lang="ja-JP" altLang="en-US" smtClean="0"/>
               <a:t>‹#›</a:t>
             </a:fld>
@@ -1626,7 +1626,7 @@
     </p:spTree>
     <p:extLst>
       <p:ext uri="{BB962C8B-B14F-4D97-AF65-F5344CB8AC3E}">
-        <p14:creationId xmlns:p14="http://schemas.microsoft.com/office/powerpoint/2010/main" val="1049329133"/>
+        <p14:creationId xmlns:p14="http://schemas.microsoft.com/office/powerpoint/2010/main" val="3249085354"/>
       </p:ext>
     </p:extLst>
   </p:cSld>
@@ -1658,7 +1658,7 @@
           <p:cNvPr id="2" name="タイトル 1">
             <a:extLst>
               <a:ext uri="{FF2B5EF4-FFF2-40B4-BE49-F238E27FC236}">
-                <a16:creationId xmlns:a16="http://schemas.microsoft.com/office/drawing/2014/main" id="{9C20BF93-2F57-B29D-2F01-C16FB47AAF93}"/>
+                <a16:creationId xmlns:a16="http://schemas.microsoft.com/office/drawing/2014/main" id="{C803CBBF-5BB7-7001-AA80-57D47A5BF6FD}"/>
               </a:ext>
             </a:extLst>
           </p:cNvPr>
@@ -1691,7 +1691,7 @@
           <p:cNvPr id="3" name="テキスト プレースホルダー 2">
             <a:extLst>
               <a:ext uri="{FF2B5EF4-FFF2-40B4-BE49-F238E27FC236}">
-                <a16:creationId xmlns:a16="http://schemas.microsoft.com/office/drawing/2014/main" id="{A93D49A8-C869-6CFD-A1E2-AB314D4449CB}"/>
+                <a16:creationId xmlns:a16="http://schemas.microsoft.com/office/drawing/2014/main" id="{5C32F914-12FF-C5E6-D705-D362E1BA99C9}"/>
               </a:ext>
             </a:extLst>
           </p:cNvPr>
@@ -1762,7 +1762,7 @@
           <p:cNvPr id="4" name="コンテンツ プレースホルダー 3">
             <a:extLst>
               <a:ext uri="{FF2B5EF4-FFF2-40B4-BE49-F238E27FC236}">
-                <a16:creationId xmlns:a16="http://schemas.microsoft.com/office/drawing/2014/main" id="{9728CA7F-1D53-019D-0999-06FE3A8C6DA0}"/>
+                <a16:creationId xmlns:a16="http://schemas.microsoft.com/office/drawing/2014/main" id="{69AEE690-DBC3-5540-EA2F-E017487DFB1A}"/>
               </a:ext>
             </a:extLst>
           </p:cNvPr>
@@ -1856,7 +1856,7 @@
           <p:cNvPr id="5" name="テキスト プレースホルダー 4">
             <a:extLst>
               <a:ext uri="{FF2B5EF4-FFF2-40B4-BE49-F238E27FC236}">
-                <a16:creationId xmlns:a16="http://schemas.microsoft.com/office/drawing/2014/main" id="{62740F86-D353-0B4B-C523-428668971730}"/>
+                <a16:creationId xmlns:a16="http://schemas.microsoft.com/office/drawing/2014/main" id="{109202A7-B140-ABC2-8D41-69538D121D27}"/>
               </a:ext>
             </a:extLst>
           </p:cNvPr>
@@ -1927,7 +1927,7 @@
           <p:cNvPr id="6" name="コンテンツ プレースホルダー 5">
             <a:extLst>
               <a:ext uri="{FF2B5EF4-FFF2-40B4-BE49-F238E27FC236}">
-                <a16:creationId xmlns:a16="http://schemas.microsoft.com/office/drawing/2014/main" id="{835D8149-520F-2D13-2CCE-8C0FBAEBC52F}"/>
+                <a16:creationId xmlns:a16="http://schemas.microsoft.com/office/drawing/2014/main" id="{A87BE1F4-6D7A-9D28-E8BA-89A5767ADDF7}"/>
               </a:ext>
             </a:extLst>
           </p:cNvPr>
@@ -2021,7 +2021,7 @@
           <p:cNvPr id="7" name="日付プレースホルダー 6">
             <a:extLst>
               <a:ext uri="{FF2B5EF4-FFF2-40B4-BE49-F238E27FC236}">
-                <a16:creationId xmlns:a16="http://schemas.microsoft.com/office/drawing/2014/main" id="{57E9C765-BF2F-2B8F-A2E8-92B8A96DB934}"/>
+                <a16:creationId xmlns:a16="http://schemas.microsoft.com/office/drawing/2014/main" id="{EE425B83-2A67-0AFB-61DF-0D046818BC14}"/>
               </a:ext>
             </a:extLst>
           </p:cNvPr>
@@ -2037,7 +2037,7 @@
           <a:bodyPr/>
           <a:lstStyle/>
           <a:p>
-            <a:fld id="{254FE170-FB10-4E9A-9B4E-124961B13B8D}" type="datetimeFigureOut">
+            <a:fld id="{C004223E-9982-4FFA-B17B-D0FEA01B5643}" type="datetimeFigureOut">
               <a:rPr kumimoji="1" lang="ja-JP" altLang="en-US" smtClean="0"/>
               <a:t>2026/7/30</a:t>
             </a:fld>
@@ -2050,7 +2050,7 @@
           <p:cNvPr id="8" name="フッター プレースホルダー 7">
             <a:extLst>
               <a:ext uri="{FF2B5EF4-FFF2-40B4-BE49-F238E27FC236}">
-                <a16:creationId xmlns:a16="http://schemas.microsoft.com/office/drawing/2014/main" id="{E4495CAB-03F6-31D8-2983-8614DA4E8F27}"/>
+                <a16:creationId xmlns:a16="http://schemas.microsoft.com/office/drawing/2014/main" id="{7A93943B-B635-A005-D2EB-58A58A3E913C}"/>
               </a:ext>
             </a:extLst>
           </p:cNvPr>
@@ -2075,7 +2075,7 @@
           <p:cNvPr id="9" name="スライド番号プレースホルダー 8">
             <a:extLst>
               <a:ext uri="{FF2B5EF4-FFF2-40B4-BE49-F238E27FC236}">
-                <a16:creationId xmlns:a16="http://schemas.microsoft.com/office/drawing/2014/main" id="{F5F0004E-EDDB-C644-EBEE-174257B8D7D6}"/>
+                <a16:creationId xmlns:a16="http://schemas.microsoft.com/office/drawing/2014/main" id="{78F89779-B30D-7C1E-754A-46A5A9AE4F8D}"/>
               </a:ext>
             </a:extLst>
           </p:cNvPr>
@@ -2091,7 +2091,7 @@
           <a:bodyPr/>
           <a:lstStyle/>
           <a:p>
-            <a:fld id="{5E2C72A1-BC9D-437B-BECB-2EBDB5F913C5}" type="slidenum">
+            <a:fld id="{454A2CEA-8771-4DFB-BBAA-8A4F904143C0}" type="slidenum">
               <a:rPr kumimoji="1" lang="ja-JP" altLang="en-US" smtClean="0"/>
               <a:t>‹#›</a:t>
             </a:fld>
@@ -2102,7 +2102,7 @@
     </p:spTree>
     <p:extLst>
       <p:ext uri="{BB962C8B-B14F-4D97-AF65-F5344CB8AC3E}">
-        <p14:creationId xmlns:p14="http://schemas.microsoft.com/office/powerpoint/2010/main" val="1379043397"/>
+        <p14:creationId xmlns:p14="http://schemas.microsoft.com/office/powerpoint/2010/main" val="265685554"/>
       </p:ext>
     </p:extLst>
   </p:cSld>
@@ -2134,7 +2134,7 @@
           <p:cNvPr id="2" name="タイトル 1">
             <a:extLst>
               <a:ext uri="{FF2B5EF4-FFF2-40B4-BE49-F238E27FC236}">
-                <a16:creationId xmlns:a16="http://schemas.microsoft.com/office/drawing/2014/main" id="{137EEFE9-5B87-6D10-C2E6-07462C6D1FC5}"/>
+                <a16:creationId xmlns:a16="http://schemas.microsoft.com/office/drawing/2014/main" id="{317D4E3B-9A01-0975-E67D-21F2E344674B}"/>
               </a:ext>
             </a:extLst>
           </p:cNvPr>
@@ -2162,7 +2162,7 @@
           <p:cNvPr id="3" name="日付プレースホルダー 2">
             <a:extLst>
               <a:ext uri="{FF2B5EF4-FFF2-40B4-BE49-F238E27FC236}">
-                <a16:creationId xmlns:a16="http://schemas.microsoft.com/office/drawing/2014/main" id="{A3DB0266-CD78-1B8C-E21B-3C3EC017475B}"/>
+                <a16:creationId xmlns:a16="http://schemas.microsoft.com/office/drawing/2014/main" id="{593F48A6-059E-D15F-B667-214E0745F0FD}"/>
               </a:ext>
             </a:extLst>
           </p:cNvPr>
@@ -2178,7 +2178,7 @@
           <a:bodyPr/>
           <a:lstStyle/>
           <a:p>
-            <a:fld id="{254FE170-FB10-4E9A-9B4E-124961B13B8D}" type="datetimeFigureOut">
+            <a:fld id="{C004223E-9982-4FFA-B17B-D0FEA01B5643}" type="datetimeFigureOut">
               <a:rPr kumimoji="1" lang="ja-JP" altLang="en-US" smtClean="0"/>
               <a:t>2026/7/30</a:t>
             </a:fld>
@@ -2191,7 +2191,7 @@
           <p:cNvPr id="4" name="フッター プレースホルダー 3">
             <a:extLst>
               <a:ext uri="{FF2B5EF4-FFF2-40B4-BE49-F238E27FC236}">
-                <a16:creationId xmlns:a16="http://schemas.microsoft.com/office/drawing/2014/main" id="{8289A4DA-34EA-C2B6-AE1A-5A4886969744}"/>
+                <a16:creationId xmlns:a16="http://schemas.microsoft.com/office/drawing/2014/main" id="{DA409E8C-B1F3-2BEE-826D-C3E05883ECCF}"/>
               </a:ext>
             </a:extLst>
           </p:cNvPr>
@@ -2216,7 +2216,7 @@
           <p:cNvPr id="5" name="スライド番号プレースホルダー 4">
             <a:extLst>
               <a:ext uri="{FF2B5EF4-FFF2-40B4-BE49-F238E27FC236}">
-                <a16:creationId xmlns:a16="http://schemas.microsoft.com/office/drawing/2014/main" id="{E1CEFA1B-81DB-3589-2531-EB85AEF09EF7}"/>
+                <a16:creationId xmlns:a16="http://schemas.microsoft.com/office/drawing/2014/main" id="{15450F68-C1F7-1F08-F049-D6325759752C}"/>
               </a:ext>
             </a:extLst>
           </p:cNvPr>
@@ -2232,7 +2232,7 @@
           <a:bodyPr/>
           <a:lstStyle/>
           <a:p>
-            <a:fld id="{5E2C72A1-BC9D-437B-BECB-2EBDB5F913C5}" type="slidenum">
+            <a:fld id="{454A2CEA-8771-4DFB-BBAA-8A4F904143C0}" type="slidenum">
               <a:rPr kumimoji="1" lang="ja-JP" altLang="en-US" smtClean="0"/>
               <a:t>‹#›</a:t>
             </a:fld>
@@ -2243,7 +2243,7 @@
     </p:spTree>
     <p:extLst>
       <p:ext uri="{BB962C8B-B14F-4D97-AF65-F5344CB8AC3E}">
-        <p14:creationId xmlns:p14="http://schemas.microsoft.com/office/powerpoint/2010/main" val="3227351998"/>
+        <p14:creationId xmlns:p14="http://schemas.microsoft.com/office/powerpoint/2010/main" val="422713042"/>
       </p:ext>
     </p:extLst>
   </p:cSld>
@@ -2275,7 +2275,7 @@
           <p:cNvPr id="2" name="日付プレースホルダー 1">
             <a:extLst>
               <a:ext uri="{FF2B5EF4-FFF2-40B4-BE49-F238E27FC236}">
-                <a16:creationId xmlns:a16="http://schemas.microsoft.com/office/drawing/2014/main" id="{14073569-80E4-E792-2EA1-1D563A30BE06}"/>
+                <a16:creationId xmlns:a16="http://schemas.microsoft.com/office/drawing/2014/main" id="{9795098D-169F-2B65-4F01-117138A790B1}"/>
               </a:ext>
             </a:extLst>
           </p:cNvPr>
@@ -2291,7 +2291,7 @@
           <a:bodyPr/>
           <a:lstStyle/>
           <a:p>
-            <a:fld id="{254FE170-FB10-4E9A-9B4E-124961B13B8D}" type="datetimeFigureOut">
+            <a:fld id="{C004223E-9982-4FFA-B17B-D0FEA01B5643}" type="datetimeFigureOut">
               <a:rPr kumimoji="1" lang="ja-JP" altLang="en-US" smtClean="0"/>
               <a:t>2026/7/30</a:t>
             </a:fld>
@@ -2304,7 +2304,7 @@
           <p:cNvPr id="3" name="フッター プレースホルダー 2">
             <a:extLst>
               <a:ext uri="{FF2B5EF4-FFF2-40B4-BE49-F238E27FC236}">
-                <a16:creationId xmlns:a16="http://schemas.microsoft.com/office/drawing/2014/main" id="{75BA1BCF-0FA9-DE9D-9C6C-1F11A9FA9A18}"/>
+                <a16:creationId xmlns:a16="http://schemas.microsoft.com/office/drawing/2014/main" id="{79C7033C-ECFB-64DE-DF82-E8C1E95B4D1C}"/>
               </a:ext>
             </a:extLst>
           </p:cNvPr>
@@ -2329,7 +2329,7 @@
           <p:cNvPr id="4" name="スライド番号プレースホルダー 3">
             <a:extLst>
               <a:ext uri="{FF2B5EF4-FFF2-40B4-BE49-F238E27FC236}">
-                <a16:creationId xmlns:a16="http://schemas.microsoft.com/office/drawing/2014/main" id="{A01CA2E3-4FE5-C646-B962-B69D7B51623E}"/>
+                <a16:creationId xmlns:a16="http://schemas.microsoft.com/office/drawing/2014/main" id="{6AC1563C-5178-7BD2-967C-391155F1384F}"/>
               </a:ext>
             </a:extLst>
           </p:cNvPr>
@@ -2345,7 +2345,7 @@
           <a:bodyPr/>
           <a:lstStyle/>
           <a:p>
-            <a:fld id="{5E2C72A1-BC9D-437B-BECB-2EBDB5F913C5}" type="slidenum">
+            <a:fld id="{454A2CEA-8771-4DFB-BBAA-8A4F904143C0}" type="slidenum">
               <a:rPr kumimoji="1" lang="ja-JP" altLang="en-US" smtClean="0"/>
               <a:t>‹#›</a:t>
             </a:fld>
@@ -2356,7 +2356,7 @@
     </p:spTree>
     <p:extLst>
       <p:ext uri="{BB962C8B-B14F-4D97-AF65-F5344CB8AC3E}">
-        <p14:creationId xmlns:p14="http://schemas.microsoft.com/office/powerpoint/2010/main" val="3823901867"/>
+        <p14:creationId xmlns:p14="http://schemas.microsoft.com/office/powerpoint/2010/main" val="246172121"/>
       </p:ext>
     </p:extLst>
   </p:cSld>
@@ -2388,7 +2388,7 @@
           <p:cNvPr id="2" name="タイトル 1">
             <a:extLst>
               <a:ext uri="{FF2B5EF4-FFF2-40B4-BE49-F238E27FC236}">
-                <a16:creationId xmlns:a16="http://schemas.microsoft.com/office/drawing/2014/main" id="{4740CDC1-6FDB-5534-F7F7-C010C6E02606}"/>
+                <a16:creationId xmlns:a16="http://schemas.microsoft.com/office/drawing/2014/main" id="{A8FB6848-7FEA-7B97-E7CB-1CCA0BDE7C79}"/>
               </a:ext>
             </a:extLst>
           </p:cNvPr>
@@ -2425,7 +2425,7 @@
           <p:cNvPr id="3" name="コンテンツ プレースホルダー 2">
             <a:extLst>
               <a:ext uri="{FF2B5EF4-FFF2-40B4-BE49-F238E27FC236}">
-                <a16:creationId xmlns:a16="http://schemas.microsoft.com/office/drawing/2014/main" id="{3849ECCF-27E6-A6DF-85E2-895C7DF62D4C}"/>
+                <a16:creationId xmlns:a16="http://schemas.microsoft.com/office/drawing/2014/main" id="{23DF81DA-EF15-C62A-D0A5-781762E7561E}"/>
               </a:ext>
             </a:extLst>
           </p:cNvPr>
@@ -2547,7 +2547,7 @@
           <p:cNvPr id="4" name="テキスト プレースホルダー 3">
             <a:extLst>
               <a:ext uri="{FF2B5EF4-FFF2-40B4-BE49-F238E27FC236}">
-                <a16:creationId xmlns:a16="http://schemas.microsoft.com/office/drawing/2014/main" id="{285B12D1-6372-D41F-E35B-73AB7E1AFF5A}"/>
+                <a16:creationId xmlns:a16="http://schemas.microsoft.com/office/drawing/2014/main" id="{CB95EF6A-5FBD-B2CB-E3B1-2938D81852F7}"/>
               </a:ext>
             </a:extLst>
           </p:cNvPr>
@@ -2618,7 +2618,7 @@
           <p:cNvPr id="5" name="日付プレースホルダー 4">
             <a:extLst>
               <a:ext uri="{FF2B5EF4-FFF2-40B4-BE49-F238E27FC236}">
-                <a16:creationId xmlns:a16="http://schemas.microsoft.com/office/drawing/2014/main" id="{698E038A-C630-CE6A-E266-F6412768B672}"/>
+                <a16:creationId xmlns:a16="http://schemas.microsoft.com/office/drawing/2014/main" id="{FF08F6B7-C37D-F587-EA5B-D82B187935DB}"/>
               </a:ext>
             </a:extLst>
           </p:cNvPr>
@@ -2634,7 +2634,7 @@
           <a:bodyPr/>
           <a:lstStyle/>
           <a:p>
-            <a:fld id="{254FE170-FB10-4E9A-9B4E-124961B13B8D}" type="datetimeFigureOut">
+            <a:fld id="{C004223E-9982-4FFA-B17B-D0FEA01B5643}" type="datetimeFigureOut">
               <a:rPr kumimoji="1" lang="ja-JP" altLang="en-US" smtClean="0"/>
               <a:t>2026/7/30</a:t>
             </a:fld>
@@ -2647,7 +2647,7 @@
           <p:cNvPr id="6" name="フッター プレースホルダー 5">
             <a:extLst>
               <a:ext uri="{FF2B5EF4-FFF2-40B4-BE49-F238E27FC236}">
-                <a16:creationId xmlns:a16="http://schemas.microsoft.com/office/drawing/2014/main" id="{AF46A801-97E6-5C7D-7C1A-ACC45D0AD648}"/>
+                <a16:creationId xmlns:a16="http://schemas.microsoft.com/office/drawing/2014/main" id="{D508C614-E6BD-67CB-C039-20F0CA802B09}"/>
               </a:ext>
             </a:extLst>
           </p:cNvPr>
@@ -2672,7 +2672,7 @@
           <p:cNvPr id="7" name="スライド番号プレースホルダー 6">
             <a:extLst>
               <a:ext uri="{FF2B5EF4-FFF2-40B4-BE49-F238E27FC236}">
-                <a16:creationId xmlns:a16="http://schemas.microsoft.com/office/drawing/2014/main" id="{82E5FE26-7D84-3626-CC66-280403A91186}"/>
+                <a16:creationId xmlns:a16="http://schemas.microsoft.com/office/drawing/2014/main" id="{77C1FB95-EC0F-C2DA-FB44-EDFFF7C8C15A}"/>
               </a:ext>
             </a:extLst>
           </p:cNvPr>
@@ -2688,7 +2688,7 @@
           <a:bodyPr/>
           <a:lstStyle/>
           <a:p>
-            <a:fld id="{5E2C72A1-BC9D-437B-BECB-2EBDB5F913C5}" type="slidenum">
+            <a:fld id="{454A2CEA-8771-4DFB-BBAA-8A4F904143C0}" type="slidenum">
               <a:rPr kumimoji="1" lang="ja-JP" altLang="en-US" smtClean="0"/>
               <a:t>‹#›</a:t>
             </a:fld>
@@ -2699,7 +2699,7 @@
     </p:spTree>
     <p:extLst>
       <p:ext uri="{BB962C8B-B14F-4D97-AF65-F5344CB8AC3E}">
-        <p14:creationId xmlns:p14="http://schemas.microsoft.com/office/powerpoint/2010/main" val="1161693579"/>
+        <p14:creationId xmlns:p14="http://schemas.microsoft.com/office/powerpoint/2010/main" val="2918805244"/>
       </p:ext>
     </p:extLst>
   </p:cSld>
@@ -2731,7 +2731,7 @@
           <p:cNvPr id="2" name="タイトル 1">
             <a:extLst>
               <a:ext uri="{FF2B5EF4-FFF2-40B4-BE49-F238E27FC236}">
-                <a16:creationId xmlns:a16="http://schemas.microsoft.com/office/drawing/2014/main" id="{D1C74E8F-A081-A724-0E03-C86C2B410294}"/>
+                <a16:creationId xmlns:a16="http://schemas.microsoft.com/office/drawing/2014/main" id="{1A56F85D-14AF-899E-C040-F6A72C1A0B95}"/>
               </a:ext>
             </a:extLst>
           </p:cNvPr>
@@ -2768,7 +2768,7 @@
           <p:cNvPr id="3" name="図プレースホルダー 2">
             <a:extLst>
               <a:ext uri="{FF2B5EF4-FFF2-40B4-BE49-F238E27FC236}">
-                <a16:creationId xmlns:a16="http://schemas.microsoft.com/office/drawing/2014/main" id="{1B1ABCF3-0797-F2DD-8E2E-B85B0D7B4AAD}"/>
+                <a16:creationId xmlns:a16="http://schemas.microsoft.com/office/drawing/2014/main" id="{79630271-FF1D-CE4D-DE36-15F32D0090E9}"/>
               </a:ext>
             </a:extLst>
           </p:cNvPr>
@@ -2835,7 +2835,7 @@
           <p:cNvPr id="4" name="テキスト プレースホルダー 3">
             <a:extLst>
               <a:ext uri="{FF2B5EF4-FFF2-40B4-BE49-F238E27FC236}">
-                <a16:creationId xmlns:a16="http://schemas.microsoft.com/office/drawing/2014/main" id="{0E40A555-985F-0013-E6D3-3A752F7BB75B}"/>
+                <a16:creationId xmlns:a16="http://schemas.microsoft.com/office/drawing/2014/main" id="{3D98C1B4-69BB-CCDF-027F-704FDC1C8EF9}"/>
               </a:ext>
             </a:extLst>
           </p:cNvPr>
@@ -2906,7 +2906,7 @@
           <p:cNvPr id="5" name="日付プレースホルダー 4">
             <a:extLst>
               <a:ext uri="{FF2B5EF4-FFF2-40B4-BE49-F238E27FC236}">
-                <a16:creationId xmlns:a16="http://schemas.microsoft.com/office/drawing/2014/main" id="{5A634138-909A-4292-9340-8DC1F47F87AC}"/>
+                <a16:creationId xmlns:a16="http://schemas.microsoft.com/office/drawing/2014/main" id="{0FEC31DD-1E02-9D89-8C9B-572F82ED6811}"/>
               </a:ext>
             </a:extLst>
           </p:cNvPr>
@@ -2922,7 +2922,7 @@
           <a:bodyPr/>
           <a:lstStyle/>
           <a:p>
-            <a:fld id="{254FE170-FB10-4E9A-9B4E-124961B13B8D}" type="datetimeFigureOut">
+            <a:fld id="{C004223E-9982-4FFA-B17B-D0FEA01B5643}" type="datetimeFigureOut">
               <a:rPr kumimoji="1" lang="ja-JP" altLang="en-US" smtClean="0"/>
               <a:t>2026/7/30</a:t>
             </a:fld>
@@ -2935,7 +2935,7 @@
           <p:cNvPr id="6" name="フッター プレースホルダー 5">
             <a:extLst>
               <a:ext uri="{FF2B5EF4-FFF2-40B4-BE49-F238E27FC236}">
-                <a16:creationId xmlns:a16="http://schemas.microsoft.com/office/drawing/2014/main" id="{D10B9FE5-AFBA-B626-744E-1BF0EB204484}"/>
+                <a16:creationId xmlns:a16="http://schemas.microsoft.com/office/drawing/2014/main" id="{0A28B2AE-80D2-11CE-77E1-8BFE7499EDCE}"/>
               </a:ext>
             </a:extLst>
           </p:cNvPr>
@@ -2960,7 +2960,7 @@
           <p:cNvPr id="7" name="スライド番号プレースホルダー 6">
             <a:extLst>
               <a:ext uri="{FF2B5EF4-FFF2-40B4-BE49-F238E27FC236}">
-                <a16:creationId xmlns:a16="http://schemas.microsoft.com/office/drawing/2014/main" id="{097C834B-E329-812E-9B19-BD78DCAE39B4}"/>
+                <a16:creationId xmlns:a16="http://schemas.microsoft.com/office/drawing/2014/main" id="{4EFC89E3-F55D-BABE-91A1-971C5EC593CF}"/>
               </a:ext>
             </a:extLst>
           </p:cNvPr>
@@ -2976,7 +2976,7 @@
           <a:bodyPr/>
           <a:lstStyle/>
           <a:p>
-            <a:fld id="{5E2C72A1-BC9D-437B-BECB-2EBDB5F913C5}" type="slidenum">
+            <a:fld id="{454A2CEA-8771-4DFB-BBAA-8A4F904143C0}" type="slidenum">
               <a:rPr kumimoji="1" lang="ja-JP" altLang="en-US" smtClean="0"/>
               <a:t>‹#›</a:t>
             </a:fld>
@@ -2987,7 +2987,7 @@
     </p:spTree>
     <p:extLst>
       <p:ext uri="{BB962C8B-B14F-4D97-AF65-F5344CB8AC3E}">
-        <p14:creationId xmlns:p14="http://schemas.microsoft.com/office/powerpoint/2010/main" val="1603649463"/>
+        <p14:creationId xmlns:p14="http://schemas.microsoft.com/office/powerpoint/2010/main" val="1442591730"/>
       </p:ext>
     </p:extLst>
   </p:cSld>
@@ -3024,7 +3024,7 @@
           <p:cNvPr id="2" name="タイトル プレースホルダー 1">
             <a:extLst>
               <a:ext uri="{FF2B5EF4-FFF2-40B4-BE49-F238E27FC236}">
-                <a16:creationId xmlns:a16="http://schemas.microsoft.com/office/drawing/2014/main" id="{3B871177-BB94-C6FA-3365-2DA3B16ABF06}"/>
+                <a16:creationId xmlns:a16="http://schemas.microsoft.com/office/drawing/2014/main" id="{43941589-6C46-8571-67BE-B3E7FBBF3B1F}"/>
               </a:ext>
             </a:extLst>
           </p:cNvPr>
@@ -3062,7 +3062,7 @@
           <p:cNvPr id="3" name="テキスト プレースホルダー 2">
             <a:extLst>
               <a:ext uri="{FF2B5EF4-FFF2-40B4-BE49-F238E27FC236}">
-                <a16:creationId xmlns:a16="http://schemas.microsoft.com/office/drawing/2014/main" id="{A50A537D-86E0-84B2-4C84-B1FE2A512AEE}"/>
+                <a16:creationId xmlns:a16="http://schemas.microsoft.com/office/drawing/2014/main" id="{A4B25B3F-11B3-041A-8182-903485C9FFD8}"/>
               </a:ext>
             </a:extLst>
           </p:cNvPr>
@@ -3161,7 +3161,7 @@
           <p:cNvPr id="4" name="日付プレースホルダー 3">
             <a:extLst>
               <a:ext uri="{FF2B5EF4-FFF2-40B4-BE49-F238E27FC236}">
-                <a16:creationId xmlns:a16="http://schemas.microsoft.com/office/drawing/2014/main" id="{3EEB835F-4365-23A0-2A36-D3711DBD9211}"/>
+                <a16:creationId xmlns:a16="http://schemas.microsoft.com/office/drawing/2014/main" id="{A5B9A18F-62C9-8FDD-B0A0-BF865AF6037D}"/>
               </a:ext>
             </a:extLst>
           </p:cNvPr>
@@ -3195,7 +3195,7 @@
             </a:lvl1pPr>
           </a:lstStyle>
           <a:p>
-            <a:fld id="{254FE170-FB10-4E9A-9B4E-124961B13B8D}" type="datetimeFigureOut">
+            <a:fld id="{C004223E-9982-4FFA-B17B-D0FEA01B5643}" type="datetimeFigureOut">
               <a:rPr kumimoji="1" lang="ja-JP" altLang="en-US" smtClean="0"/>
               <a:t>2026/7/30</a:t>
             </a:fld>
@@ -3208,7 +3208,7 @@
           <p:cNvPr id="5" name="フッター プレースホルダー 4">
             <a:extLst>
               <a:ext uri="{FF2B5EF4-FFF2-40B4-BE49-F238E27FC236}">
-                <a16:creationId xmlns:a16="http://schemas.microsoft.com/office/drawing/2014/main" id="{C08A3058-452E-70D5-748F-CE38A55120A4}"/>
+                <a16:creationId xmlns:a16="http://schemas.microsoft.com/office/drawing/2014/main" id="{F709AADD-C016-068A-8DF8-91AF5813C7E7}"/>
               </a:ext>
             </a:extLst>
           </p:cNvPr>
@@ -3251,7 +3251,7 @@
           <p:cNvPr id="6" name="スライド番号プレースホルダー 5">
             <a:extLst>
               <a:ext uri="{FF2B5EF4-FFF2-40B4-BE49-F238E27FC236}">
-                <a16:creationId xmlns:a16="http://schemas.microsoft.com/office/drawing/2014/main" id="{84211BDB-07DE-AE57-6460-667C8B807A03}"/>
+                <a16:creationId xmlns:a16="http://schemas.microsoft.com/office/drawing/2014/main" id="{A3BCAAEE-8781-D39B-B371-18FA77C7D346}"/>
               </a:ext>
             </a:extLst>
           </p:cNvPr>
@@ -3285,7 +3285,7 @@
             </a:lvl1pPr>
           </a:lstStyle>
           <a:p>
-            <a:fld id="{5E2C72A1-BC9D-437B-BECB-2EBDB5F913C5}" type="slidenum">
+            <a:fld id="{454A2CEA-8771-4DFB-BBAA-8A4F904143C0}" type="slidenum">
               <a:rPr kumimoji="1" lang="ja-JP" altLang="en-US" smtClean="0"/>
               <a:t>‹#›</a:t>
             </a:fld>
@@ -3296,7 +3296,7 @@
     </p:spTree>
     <p:extLst>
       <p:ext uri="{BB962C8B-B14F-4D97-AF65-F5344CB8AC3E}">
-        <p14:creationId xmlns:p14="http://schemas.microsoft.com/office/powerpoint/2010/main" val="772930982"/>
+        <p14:creationId xmlns:p14="http://schemas.microsoft.com/office/powerpoint/2010/main" val="19091871"/>
       </p:ext>
     </p:extLst>
   </p:cSld>
@@ -3619,7 +3619,7 @@
           <p:cNvPr id="2" name="テキスト ボックス 1">
             <a:extLst>
               <a:ext uri="{FF2B5EF4-FFF2-40B4-BE49-F238E27FC236}">
-                <a16:creationId xmlns:a16="http://schemas.microsoft.com/office/drawing/2014/main" id="{2ED1A290-F192-0FCD-7C7C-44910BF60A68}"/>
+                <a16:creationId xmlns:a16="http://schemas.microsoft.com/office/drawing/2014/main" id="{F985F581-0B6C-DA49-C400-760D3E4333FD}"/>
               </a:ext>
             </a:extLst>
           </p:cNvPr>
@@ -3665,7 +3665,7 @@
           <p:cNvPr id="3" name="テキスト ボックス 2">
             <a:extLst>
               <a:ext uri="{FF2B5EF4-FFF2-40B4-BE49-F238E27FC236}">
-                <a16:creationId xmlns:a16="http://schemas.microsoft.com/office/drawing/2014/main" id="{E0F1E0D2-73E2-0C65-8B84-17922337B01F}"/>
+                <a16:creationId xmlns:a16="http://schemas.microsoft.com/office/drawing/2014/main" id="{BC10CCF0-E8A3-F0F7-AEF5-81EB061D31DD}"/>
               </a:ext>
             </a:extLst>
           </p:cNvPr>
@@ -3714,7 +3714,7 @@
           <p:cNvPr id="4" name="テキスト ボックス 3">
             <a:extLst>
               <a:ext uri="{FF2B5EF4-FFF2-40B4-BE49-F238E27FC236}">
-                <a16:creationId xmlns:a16="http://schemas.microsoft.com/office/drawing/2014/main" id="{B854869D-CFB5-2222-E0E6-B18469D5F0C8}"/>
+                <a16:creationId xmlns:a16="http://schemas.microsoft.com/office/drawing/2014/main" id="{BF493394-CEE3-7E3E-D37D-D6FE5787D9B5}"/>
               </a:ext>
             </a:extLst>
           </p:cNvPr>
@@ -3754,7 +3754,7 @@
           <p:cNvPr id="5" name="テキスト ボックス 4">
             <a:extLst>
               <a:ext uri="{FF2B5EF4-FFF2-40B4-BE49-F238E27FC236}">
-                <a16:creationId xmlns:a16="http://schemas.microsoft.com/office/drawing/2014/main" id="{A7E36E5A-F10C-3C97-A6A4-960EFCC2CE27}"/>
+                <a16:creationId xmlns:a16="http://schemas.microsoft.com/office/drawing/2014/main" id="{6AF6E5AB-9F78-ACC7-9FF7-9A035C67CF0F}"/>
               </a:ext>
             </a:extLst>
           </p:cNvPr>
@@ -3801,7 +3801,7 @@
             <a:hlinkClick r:id="" action="ppaction://media"/>
             <a:extLst>
               <a:ext uri="{FF2B5EF4-FFF2-40B4-BE49-F238E27FC236}">
-                <a16:creationId xmlns:a16="http://schemas.microsoft.com/office/drawing/2014/main" id="{794F3EF4-B3C3-CF39-82D3-089AA79AEF8E}"/>
+                <a16:creationId xmlns:a16="http://schemas.microsoft.com/office/drawing/2014/main" id="{F7D05280-C3E8-1D6F-4B48-5C40D361D7B3}"/>
               </a:ext>
             </a:extLst>
           </p:cNvPr>
@@ -3836,7 +3836,7 @@
     </p:spTree>
     <p:extLst>
       <p:ext uri="{BB962C8B-B14F-4D97-AF65-F5344CB8AC3E}">
-        <p14:creationId xmlns:p14="http://schemas.microsoft.com/office/powerpoint/2010/main" val="152919866"/>
+        <p14:creationId xmlns:p14="http://schemas.microsoft.com/office/powerpoint/2010/main" val="832970227"/>
       </p:ext>
     </p:extLst>
   </p:cSld>
@@ -3960,7 +3960,7 @@
           <p:cNvPr id="2" name="テキスト ボックス 1">
             <a:extLst>
               <a:ext uri="{FF2B5EF4-FFF2-40B4-BE49-F238E27FC236}">
-                <a16:creationId xmlns:a16="http://schemas.microsoft.com/office/drawing/2014/main" id="{4C815062-9D16-2DB3-642B-BB2A8956AD84}"/>
+                <a16:creationId xmlns:a16="http://schemas.microsoft.com/office/drawing/2014/main" id="{F9C3AF50-3468-4548-3285-04D6D6A46252}"/>
               </a:ext>
             </a:extLst>
           </p:cNvPr>
@@ -4006,7 +4006,7 @@
           <p:cNvPr id="3" name="テキスト ボックス 2">
             <a:extLst>
               <a:ext uri="{FF2B5EF4-FFF2-40B4-BE49-F238E27FC236}">
-                <a16:creationId xmlns:a16="http://schemas.microsoft.com/office/drawing/2014/main" id="{09143F44-3EF3-3336-3FF3-08CC63595758}"/>
+                <a16:creationId xmlns:a16="http://schemas.microsoft.com/office/drawing/2014/main" id="{09B7B558-C186-93B1-520F-2688386E98CB}"/>
               </a:ext>
             </a:extLst>
           </p:cNvPr>
@@ -4046,7 +4046,7 @@
           <p:cNvPr id="4" name="テキスト ボックス 3">
             <a:extLst>
               <a:ext uri="{FF2B5EF4-FFF2-40B4-BE49-F238E27FC236}">
-                <a16:creationId xmlns:a16="http://schemas.microsoft.com/office/drawing/2014/main" id="{9A2894B1-A5A3-A696-F2C2-C4D2EB324CD8}"/>
+                <a16:creationId xmlns:a16="http://schemas.microsoft.com/office/drawing/2014/main" id="{D2FAC6A8-72BE-4D22-ED1B-FEF847427ECF}"/>
               </a:ext>
             </a:extLst>
           </p:cNvPr>
@@ -4110,7 +4110,7 @@
           <p:cNvPr id="5" name="テキスト ボックス 4">
             <a:extLst>
               <a:ext uri="{FF2B5EF4-FFF2-40B4-BE49-F238E27FC236}">
-                <a16:creationId xmlns:a16="http://schemas.microsoft.com/office/drawing/2014/main" id="{E89A7375-6003-CE1C-4B7A-D8C66B96AAFF}"/>
+                <a16:creationId xmlns:a16="http://schemas.microsoft.com/office/drawing/2014/main" id="{10165F14-FF37-B8D0-5148-2C869FA56FBE}"/>
               </a:ext>
             </a:extLst>
           </p:cNvPr>
@@ -4157,7 +4157,7 @@
             <a:hlinkClick r:id="" action="ppaction://media"/>
             <a:extLst>
               <a:ext uri="{FF2B5EF4-FFF2-40B4-BE49-F238E27FC236}">
-                <a16:creationId xmlns:a16="http://schemas.microsoft.com/office/drawing/2014/main" id="{614CE856-5077-2A3C-D285-824B035407C9}"/>
+                <a16:creationId xmlns:a16="http://schemas.microsoft.com/office/drawing/2014/main" id="{357FD3B3-6E38-80F5-EF01-42BDB6DB5FDF}"/>
               </a:ext>
             </a:extLst>
           </p:cNvPr>
@@ -4192,7 +4192,7 @@
     </p:spTree>
     <p:extLst>
       <p:ext uri="{BB962C8B-B14F-4D97-AF65-F5344CB8AC3E}">
-        <p14:creationId xmlns:p14="http://schemas.microsoft.com/office/powerpoint/2010/main" val="3811653197"/>
+        <p14:creationId xmlns:p14="http://schemas.microsoft.com/office/powerpoint/2010/main" val="1351876521"/>
       </p:ext>
     </p:extLst>
   </p:cSld>
@@ -4316,7 +4316,7 @@
           <p:cNvPr id="2" name="テキスト ボックス 1">
             <a:extLst>
               <a:ext uri="{FF2B5EF4-FFF2-40B4-BE49-F238E27FC236}">
-                <a16:creationId xmlns:a16="http://schemas.microsoft.com/office/drawing/2014/main" id="{C45952B4-9590-14E1-8820-D1CAADEBC67E}"/>
+                <a16:creationId xmlns:a16="http://schemas.microsoft.com/office/drawing/2014/main" id="{D71DCB59-1253-61FE-828F-8B1D43075D16}"/>
               </a:ext>
             </a:extLst>
           </p:cNvPr>
@@ -4362,7 +4362,7 @@
           <p:cNvPr id="3" name="テキスト ボックス 2">
             <a:extLst>
               <a:ext uri="{FF2B5EF4-FFF2-40B4-BE49-F238E27FC236}">
-                <a16:creationId xmlns:a16="http://schemas.microsoft.com/office/drawing/2014/main" id="{84B852D6-C8DC-E575-238C-F3AF40386C9E}"/>
+                <a16:creationId xmlns:a16="http://schemas.microsoft.com/office/drawing/2014/main" id="{E6F3C3A0-826C-861C-4CD7-F8C65030383F}"/>
               </a:ext>
             </a:extLst>
           </p:cNvPr>
@@ -4402,7 +4402,7 @@
           <p:cNvPr id="4" name="テキスト ボックス 3">
             <a:extLst>
               <a:ext uri="{FF2B5EF4-FFF2-40B4-BE49-F238E27FC236}">
-                <a16:creationId xmlns:a16="http://schemas.microsoft.com/office/drawing/2014/main" id="{67B45FCB-E4A0-A678-084D-FA1311D4BB44}"/>
+                <a16:creationId xmlns:a16="http://schemas.microsoft.com/office/drawing/2014/main" id="{87FD6D97-15C6-845C-5206-C27F77D615E5}"/>
               </a:ext>
             </a:extLst>
           </p:cNvPr>
@@ -4497,7 +4497,7 @@
           <p:cNvPr id="5" name="テキスト ボックス 4">
             <a:extLst>
               <a:ext uri="{FF2B5EF4-FFF2-40B4-BE49-F238E27FC236}">
-                <a16:creationId xmlns:a16="http://schemas.microsoft.com/office/drawing/2014/main" id="{96B4D2C6-5023-350F-5029-189EBA9B355D}"/>
+                <a16:creationId xmlns:a16="http://schemas.microsoft.com/office/drawing/2014/main" id="{07FF4E22-51C1-CF1D-B1B8-323027C747A8}"/>
               </a:ext>
             </a:extLst>
           </p:cNvPr>
@@ -4544,7 +4544,7 @@
             <a:hlinkClick r:id="" action="ppaction://media"/>
             <a:extLst>
               <a:ext uri="{FF2B5EF4-FFF2-40B4-BE49-F238E27FC236}">
-                <a16:creationId xmlns:a16="http://schemas.microsoft.com/office/drawing/2014/main" id="{9CDB430C-6C60-3224-EC7E-0A3C2F66970B}"/>
+                <a16:creationId xmlns:a16="http://schemas.microsoft.com/office/drawing/2014/main" id="{0AAD385F-7553-56B6-8076-575A0F52712D}"/>
               </a:ext>
             </a:extLst>
           </p:cNvPr>
@@ -4579,7 +4579,7 @@
     </p:spTree>
     <p:extLst>
       <p:ext uri="{BB962C8B-B14F-4D97-AF65-F5344CB8AC3E}">
-        <p14:creationId xmlns:p14="http://schemas.microsoft.com/office/powerpoint/2010/main" val="260030171"/>
+        <p14:creationId xmlns:p14="http://schemas.microsoft.com/office/powerpoint/2010/main" val="2082987816"/>
       </p:ext>
     </p:extLst>
   </p:cSld>
@@ -4703,7 +4703,7 @@
           <p:cNvPr id="2" name="テキスト ボックス 1">
             <a:extLst>
               <a:ext uri="{FF2B5EF4-FFF2-40B4-BE49-F238E27FC236}">
-                <a16:creationId xmlns:a16="http://schemas.microsoft.com/office/drawing/2014/main" id="{02AAFA93-D328-9154-2044-535AB6980848}"/>
+                <a16:creationId xmlns:a16="http://schemas.microsoft.com/office/drawing/2014/main" id="{D7B7D85A-AEE3-9558-9C21-797C9F3ED89C}"/>
               </a:ext>
             </a:extLst>
           </p:cNvPr>
@@ -4749,7 +4749,7 @@
           <p:cNvPr id="3" name="テキスト ボックス 2">
             <a:extLst>
               <a:ext uri="{FF2B5EF4-FFF2-40B4-BE49-F238E27FC236}">
-                <a16:creationId xmlns:a16="http://schemas.microsoft.com/office/drawing/2014/main" id="{3C1AEABC-198F-3C99-49FB-7197405FFCBA}"/>
+                <a16:creationId xmlns:a16="http://schemas.microsoft.com/office/drawing/2014/main" id="{DFD26624-578E-363A-47FE-DE5C0CE5188A}"/>
               </a:ext>
             </a:extLst>
           </p:cNvPr>
@@ -4789,7 +4789,7 @@
           <p:cNvPr id="4" name="テキスト ボックス 3">
             <a:extLst>
               <a:ext uri="{FF2B5EF4-FFF2-40B4-BE49-F238E27FC236}">
-                <a16:creationId xmlns:a16="http://schemas.microsoft.com/office/drawing/2014/main" id="{C7BFF28D-C135-B485-8619-8DBDE77DACB4}"/>
+                <a16:creationId xmlns:a16="http://schemas.microsoft.com/office/drawing/2014/main" id="{43C316CA-C523-41CE-193C-4D266A3397EC}"/>
               </a:ext>
             </a:extLst>
           </p:cNvPr>
@@ -4899,7 +4899,7 @@
           <p:cNvPr id="5" name="テキスト ボックス 4">
             <a:extLst>
               <a:ext uri="{FF2B5EF4-FFF2-40B4-BE49-F238E27FC236}">
-                <a16:creationId xmlns:a16="http://schemas.microsoft.com/office/drawing/2014/main" id="{B8E7D9B7-E1BD-510A-396B-CE7692C05068}"/>
+                <a16:creationId xmlns:a16="http://schemas.microsoft.com/office/drawing/2014/main" id="{70CE3FE6-6E01-CA1C-F515-F62344F6D4BD}"/>
               </a:ext>
             </a:extLst>
           </p:cNvPr>
@@ -4946,7 +4946,7 @@
             <a:hlinkClick r:id="" action="ppaction://media"/>
             <a:extLst>
               <a:ext uri="{FF2B5EF4-FFF2-40B4-BE49-F238E27FC236}">
-                <a16:creationId xmlns:a16="http://schemas.microsoft.com/office/drawing/2014/main" id="{6540EB17-F4A5-1B43-23B1-F38152E96F90}"/>
+                <a16:creationId xmlns:a16="http://schemas.microsoft.com/office/drawing/2014/main" id="{CDEAA5FC-A702-D7F3-060E-EAEA8D72A0A7}"/>
               </a:ext>
             </a:extLst>
           </p:cNvPr>
@@ -4981,7 +4981,7 @@
     </p:spTree>
     <p:extLst>
       <p:ext uri="{BB962C8B-B14F-4D97-AF65-F5344CB8AC3E}">
-        <p14:creationId xmlns:p14="http://schemas.microsoft.com/office/powerpoint/2010/main" val="3663973255"/>
+        <p14:creationId xmlns:p14="http://schemas.microsoft.com/office/powerpoint/2010/main" val="396544508"/>
       </p:ext>
     </p:extLst>
   </p:cSld>
@@ -5105,7 +5105,7 @@
           <p:cNvPr id="2" name="テキスト ボックス 1">
             <a:extLst>
               <a:ext uri="{FF2B5EF4-FFF2-40B4-BE49-F238E27FC236}">
-                <a16:creationId xmlns:a16="http://schemas.microsoft.com/office/drawing/2014/main" id="{C226EDBC-24AA-B1DE-0C3D-FB674E247346}"/>
+                <a16:creationId xmlns:a16="http://schemas.microsoft.com/office/drawing/2014/main" id="{8B31CCED-807E-1FD1-36AF-5024EADD2A36}"/>
               </a:ext>
             </a:extLst>
           </p:cNvPr>
@@ -5151,7 +5151,7 @@
           <p:cNvPr id="3" name="テキスト ボックス 2">
             <a:extLst>
               <a:ext uri="{FF2B5EF4-FFF2-40B4-BE49-F238E27FC236}">
-                <a16:creationId xmlns:a16="http://schemas.microsoft.com/office/drawing/2014/main" id="{89CA1355-9B18-388F-580E-842FBCC3BD67}"/>
+                <a16:creationId xmlns:a16="http://schemas.microsoft.com/office/drawing/2014/main" id="{096A54D9-1D0E-A9C0-52E3-CB33DE1A4125}"/>
               </a:ext>
             </a:extLst>
           </p:cNvPr>
@@ -5191,7 +5191,7 @@
           <p:cNvPr id="4" name="テキスト ボックス 3">
             <a:extLst>
               <a:ext uri="{FF2B5EF4-FFF2-40B4-BE49-F238E27FC236}">
-                <a16:creationId xmlns:a16="http://schemas.microsoft.com/office/drawing/2014/main" id="{F4853834-39F0-406E-8516-44B9342E5E53}"/>
+                <a16:creationId xmlns:a16="http://schemas.microsoft.com/office/drawing/2014/main" id="{1D51FC3B-A1A6-51AA-78C0-DE7E8FC22C02}"/>
               </a:ext>
             </a:extLst>
           </p:cNvPr>
@@ -5215,20 +5215,14 @@
           <a:lstStyle/>
           <a:p>
             <a:r>
-              <a:rPr kumimoji="1" lang="en-US" altLang="ja-JP" sz="2000">
+              <a:rPr kumimoji="1" lang="ja-JP" altLang="en-US" sz="2000">
                 <a:solidFill>
                   <a:srgbClr val="333333"/>
                 </a:solidFill>
                 <a:latin typeface="Arial" panose="020B0604020202020204" pitchFamily="34" charset="0"/>
               </a:rPr>
-              <a:t>Set confirmed custom domain</a:t>
-            </a:r>
-            <a:endParaRPr kumimoji="1" lang="ja-JP" altLang="en-US" sz="2000">
-              <a:solidFill>
-                <a:srgbClr val="333333"/>
-              </a:solidFill>
-              <a:latin typeface="Arial" panose="020B0604020202020204" pitchFamily="34" charset="0"/>
-            </a:endParaRPr>
+              <a:t>直近のコミットでは、実装の見直しと継続的な改善が行われました。</a:t>
+            </a:r>
           </a:p>
         </p:txBody>
       </p:sp>
@@ -5237,7 +5231,7 @@
           <p:cNvPr id="5" name="テキスト ボックス 4">
             <a:extLst>
               <a:ext uri="{FF2B5EF4-FFF2-40B4-BE49-F238E27FC236}">
-                <a16:creationId xmlns:a16="http://schemas.microsoft.com/office/drawing/2014/main" id="{6694E791-4C24-C68D-74E3-FC5766EA8D01}"/>
+                <a16:creationId xmlns:a16="http://schemas.microsoft.com/office/drawing/2014/main" id="{E4A0517F-93E4-E898-6BB6-B58E147F8644}"/>
               </a:ext>
             </a:extLst>
           </p:cNvPr>
@@ -5284,7 +5278,7 @@
             <a:hlinkClick r:id="" action="ppaction://media"/>
             <a:extLst>
               <a:ext uri="{FF2B5EF4-FFF2-40B4-BE49-F238E27FC236}">
-                <a16:creationId xmlns:a16="http://schemas.microsoft.com/office/drawing/2014/main" id="{54F4370C-6B2E-AFB4-D9F4-C6CE9E4B5C18}"/>
+                <a16:creationId xmlns:a16="http://schemas.microsoft.com/office/drawing/2014/main" id="{46E7F86A-85CB-BF7B-100B-FDD37E8457AF}"/>
               </a:ext>
             </a:extLst>
           </p:cNvPr>
@@ -5319,7 +5313,7 @@
     </p:spTree>
     <p:extLst>
       <p:ext uri="{BB962C8B-B14F-4D97-AF65-F5344CB8AC3E}">
-        <p14:creationId xmlns:p14="http://schemas.microsoft.com/office/powerpoint/2010/main" val="4152035682"/>
+        <p14:creationId xmlns:p14="http://schemas.microsoft.com/office/powerpoint/2010/main" val="4021607063"/>
       </p:ext>
     </p:extLst>
   </p:cSld>
@@ -5362,7 +5356,7 @@
                                   <p:childTnLst>
                                     <p:cmd type="call" cmd="playFrom(0.0)">
                                       <p:cBhvr>
-                                        <p:cTn id="6" dur="6451" fill="hold"/>
+                                        <p:cTn id="6" dur="6076" fill="hold"/>
                                         <p:tgtEl>
                                           <p:spTgt spid="6"/>
                                         </p:tgtEl>
@@ -5443,7 +5437,7 @@
           <p:cNvPr id="2" name="テキスト ボックス 1">
             <a:extLst>
               <a:ext uri="{FF2B5EF4-FFF2-40B4-BE49-F238E27FC236}">
-                <a16:creationId xmlns:a16="http://schemas.microsoft.com/office/drawing/2014/main" id="{59699F5D-1128-D25E-181E-20830A43E8A3}"/>
+                <a16:creationId xmlns:a16="http://schemas.microsoft.com/office/drawing/2014/main" id="{512D6683-8E31-5150-5834-DA043585293E}"/>
               </a:ext>
             </a:extLst>
           </p:cNvPr>
@@ -5489,7 +5483,7 @@
           <p:cNvPr id="3" name="テキスト ボックス 2">
             <a:extLst>
               <a:ext uri="{FF2B5EF4-FFF2-40B4-BE49-F238E27FC236}">
-                <a16:creationId xmlns:a16="http://schemas.microsoft.com/office/drawing/2014/main" id="{638BE5DC-90EC-FF5F-D454-2252FFECB80C}"/>
+                <a16:creationId xmlns:a16="http://schemas.microsoft.com/office/drawing/2014/main" id="{58C4C13D-C9D0-D6EF-9BED-FE73990D2440}"/>
               </a:ext>
             </a:extLst>
           </p:cNvPr>
@@ -5529,7 +5523,7 @@
           <p:cNvPr id="4" name="テキスト ボックス 3">
             <a:extLst>
               <a:ext uri="{FF2B5EF4-FFF2-40B4-BE49-F238E27FC236}">
-                <a16:creationId xmlns:a16="http://schemas.microsoft.com/office/drawing/2014/main" id="{A9F3DB79-62D9-B0E3-AA03-AA6EA7EA0288}"/>
+                <a16:creationId xmlns:a16="http://schemas.microsoft.com/office/drawing/2014/main" id="{B2A27E7C-0ED0-6F60-7B34-25696CA06F4C}"/>
               </a:ext>
             </a:extLst>
           </p:cNvPr>
@@ -5594,7 +5588,7 @@
           <p:cNvPr id="5" name="テキスト ボックス 4">
             <a:extLst>
               <a:ext uri="{FF2B5EF4-FFF2-40B4-BE49-F238E27FC236}">
-                <a16:creationId xmlns:a16="http://schemas.microsoft.com/office/drawing/2014/main" id="{9DAD73ED-778B-DC98-2948-4A01AE82D446}"/>
+                <a16:creationId xmlns:a16="http://schemas.microsoft.com/office/drawing/2014/main" id="{681FC8B4-2F8F-129D-C7B9-A262AF39058C}"/>
               </a:ext>
             </a:extLst>
           </p:cNvPr>
@@ -5641,7 +5635,7 @@
             <a:hlinkClick r:id="" action="ppaction://media"/>
             <a:extLst>
               <a:ext uri="{FF2B5EF4-FFF2-40B4-BE49-F238E27FC236}">
-                <a16:creationId xmlns:a16="http://schemas.microsoft.com/office/drawing/2014/main" id="{72156BCF-EBF7-CA44-1177-0A8D4EB16E8B}"/>
+                <a16:creationId xmlns:a16="http://schemas.microsoft.com/office/drawing/2014/main" id="{28409DF3-BA6E-7EB9-FE53-EE95F207CA39}"/>
               </a:ext>
             </a:extLst>
           </p:cNvPr>
@@ -5676,7 +5670,7 @@
     </p:spTree>
     <p:extLst>
       <p:ext uri="{BB962C8B-B14F-4D97-AF65-F5344CB8AC3E}">
-        <p14:creationId xmlns:p14="http://schemas.microsoft.com/office/powerpoint/2010/main" val="2370654752"/>
+        <p14:creationId xmlns:p14="http://schemas.microsoft.com/office/powerpoint/2010/main" val="3493710718"/>
       </p:ext>
     </p:extLst>
   </p:cSld>
